--- a/Presentation/PDE4435_Smart_Cart_Presentation.pptx
+++ b/Presentation/PDE4435_Smart_Cart_Presentation.pptx
@@ -7070,105 +7070,6 @@
             </a:pPr>
             <a:endParaRPr lang="en-GB" sz="1300" dirty="0"/>
           </a:p>
-          <a:p>
-            <a:pPr marL="0" indent="0">
-              <a:lnSpc>
-                <a:spcPct val="90000"/>
-              </a:lnSpc>
-              <a:buNone/>
-            </a:pPr>
-            <a:r>
-              <a:rPr lang="en-US" sz="1300" b="1" dirty="0"/>
-              <a:t>User Feedback </a:t>
-            </a:r>
-          </a:p>
-          <a:p>
-            <a:pPr>
-              <a:lnSpc>
-                <a:spcPct val="90000"/>
-              </a:lnSpc>
-            </a:pPr>
-            <a:r>
-              <a:rPr lang="en-US" sz="1300" dirty="0"/>
-              <a:t>Users found </a:t>
-            </a:r>
-            <a:r>
-              <a:rPr lang="en-US" sz="1300" b="1" dirty="0"/>
-              <a:t>mode switching (Idle / Follow / Stop)</a:t>
-            </a:r>
-            <a:r>
-              <a:rPr lang="en-US" sz="1300" dirty="0"/>
-              <a:t> intuitive and easy to control </a:t>
-            </a:r>
-          </a:p>
-          <a:p>
-            <a:pPr>
-              <a:lnSpc>
-                <a:spcPct val="90000"/>
-              </a:lnSpc>
-            </a:pPr>
-            <a:r>
-              <a:rPr lang="en-US" sz="1300" dirty="0"/>
-              <a:t>Visual feedback in RViz helped users </a:t>
-            </a:r>
-            <a:r>
-              <a:rPr lang="en-US" sz="1300" b="1" dirty="0"/>
-              <a:t>understand robot decisions in real time</a:t>
-            </a:r>
-            <a:r>
-              <a:rPr lang="en-US" sz="1300" dirty="0"/>
-              <a:t> </a:t>
-            </a:r>
-          </a:p>
-          <a:p>
-            <a:pPr>
-              <a:lnSpc>
-                <a:spcPct val="90000"/>
-              </a:lnSpc>
-            </a:pPr>
-            <a:r>
-              <a:rPr lang="en-US" sz="1300" dirty="0"/>
-              <a:t>The cart maintained a </a:t>
-            </a:r>
-            <a:r>
-              <a:rPr lang="en-US" sz="1300" b="1" dirty="0"/>
-              <a:t>comfortable and safe following distance</a:t>
-            </a:r>
-            <a:r>
-              <a:rPr lang="en-US" sz="1300" dirty="0"/>
-              <a:t> </a:t>
-            </a:r>
-          </a:p>
-          <a:p>
-            <a:pPr>
-              <a:lnSpc>
-                <a:spcPct val="90000"/>
-              </a:lnSpc>
-            </a:pPr>
-            <a:r>
-              <a:rPr lang="en-US" sz="1300" dirty="0"/>
-              <a:t>Users reported </a:t>
-            </a:r>
-            <a:r>
-              <a:rPr lang="en-US" sz="1300" b="1" dirty="0"/>
-              <a:t>confidence in obstacle avoidance behavior</a:t>
-            </a:r>
-            <a:r>
-              <a:rPr lang="en-US" sz="1300" dirty="0"/>
-              <a:t> </a:t>
-            </a:r>
-          </a:p>
-          <a:p>
-            <a:pPr>
-              <a:lnSpc>
-                <a:spcPct val="90000"/>
-              </a:lnSpc>
-            </a:pPr>
-            <a:r>
-              <a:rPr lang="en-US" sz="1300" dirty="0"/>
-              <a:t>Suggested improvement: smoother turning response during sharp direction changes</a:t>
-            </a:r>
-          </a:p>
         </p:txBody>
       </p:sp>
     </p:spTree>
